--- a/slides/COMP6704_Group4_PART_IV.pptx
+++ b/slides/COMP6704_Group4_PART_IV.pptx
@@ -39694,7 +39694,7 @@
                 </a:solidFill>
                 <a:latin typeface="Calibri"/>
               </a:rPr>
-              <a:t>Generated 2026-10-27 01:47 from 102 recorded fits · results shown for ADMM, PA-ADMM, SMO · still pending: CVXPY, Pegasos</a:t>
+              <a:t>Generated 2026-10-27 10:11 from 102 recorded fits · results shown for ADMM, PA-ADMM, SMO · still pending: CVXPY, Pegasos</a:t>
             </a:r>
           </a:p>
         </p:txBody>
@@ -42533,7 +42533,7 @@
                 </a:solidFill>
                 <a:latin typeface="Calibri"/>
               </a:rPr>
-              <a:t>At 20:1 on the full data, median time-to-tolerance: SMO n/as, ADMM 43s, PA-ADMM 49s. Final fit time is dominated by iterating past the tolerance line until the solver's own certificate (KKT / residual + duality gap) is satisfied.</a:t>
+              <a:t>At 20:1 on the full data, median time-to-tolerance: ADMM 43s, PA-ADMM 49s. SMO never reached the tolerance at 20:1. Final fit time is dominated by iterating past the tolerance line until the solver's own certificate (KKT / residual + duality gap) is satisfied.</a:t>
             </a:r>
           </a:p>
           <a:p>
@@ -42545,7 +42545,7 @@
                 </a:solidFill>
                 <a:latin typeface="Calibri"/>
               </a:rPr>
-              <a:t>Right panel counts certified seeds at the hardest ratio 50:1 → ADMM 0/5, PA-ADMM 3/5, SMO 0/5. Pushing Cᵢ higher makes the QP stiffer; PA-ADMM certifies the most seeds there. SMO exhausted its own 100,000-update limit on 15 of 15 main_full fits after 1393s of a 5400s budget (7/9 already at 35k): that 'not converged' flag is an iteration-cap outcome, not a wall-clock timeout.</a:t>
+              <a:t>Right panel counts certified seeds at the hardest ratio 50:1 → ADMM 0/5, PA-ADMM 3/5, SMO 0/5. Pushing Cᵢ higher makes the QP stiffer; PA-ADMM certifies the most seeds there. SMO exhausted its own 100,000-update limit on 15 of 15 main_full fits after 1393s of a 5400s budget (7/9 already at 35k), finishing 1.6% above the group-best objective. We keep its default cap and report this as a scalability limit of SMO under this protocol, not a wall-clock timeout.</a:t>
             </a:r>
           </a:p>
         </p:txBody>

--- a/slides/COMP6704_Group4_PART_IV.pptx
+++ b/slides/COMP6704_Group4_PART_IV.pptx
@@ -39694,7 +39694,7 @@
                 </a:solidFill>
                 <a:latin typeface="Calibri"/>
               </a:rPr>
-              <a:t>Generated 2026-10-27 10:11 from 102 recorded fits · results shown for ADMM, PA-ADMM, SMO · still pending: CVXPY, Pegasos</a:t>
+              <a:t>Generated 2026-10-27 11:00 from 105 recorded fits · results shown for ADMM, PA-ADMM, Pegasos, SMO</a:t>
             </a:r>
           </a:p>
         </p:txBody>
@@ -41209,6 +41209,18 @@
                 </a:solidFill>
                 <a:latin typeface="Calibri"/>
               </a:rPr>
+              <a:t>Pegasos   P = 10.3852   not certified   (550,000 updates/iterations)</a:t>
+            </a:r>
+          </a:p>
+          <a:p>
+            <a:pPr algn="l"/>
+            <a:r>
+              <a:rPr sz="1250" b="0">
+                <a:solidFill>
+                  <a:srgbClr val="182B3A"/>
+                </a:solidFill>
+                <a:latin typeface="Calibri"/>
+              </a:rPr>
               <a:t>ADMM      P = 5.0836   certified   (7,525 updates/iterations)</a:t>
             </a:r>
           </a:p>
@@ -41257,6 +41269,30 @@
                 <a:latin typeface="Calibri"/>
               </a:rPr>
               <a:t>One 10k stratified subset (7,000 train / 1,500 val / 1,500 test), C fixed to 1, ratio 10:1, tolerance 1e-4. WP2 also checks SMO against LIBSVM and WP3 checks ADMM against CVXPY/ECOS on identical rows.</a:t>
+            </a:r>
+          </a:p>
+          <a:p>
+            <a:pPr algn="l"/>
+            <a:r>
+              <a:rPr sz="1250" b="0">
+                <a:solidFill>
+                  <a:srgbClr val="526574"/>
+                </a:solidFill>
+                <a:latin typeface="Calibri"/>
+              </a:rPr>
+              <a:t/>
+            </a:r>
+          </a:p>
+          <a:p>
+            <a:pPr algn="l"/>
+            <a:r>
+              <a:rPr sz="1250" b="0">
+                <a:solidFill>
+                  <a:srgbClr val="526574"/>
+                </a:solidFill>
+                <a:latin typeface="Calibri"/>
+              </a:rPr>
+              <a:t>Pegasos did not certify in this configuration (cold fixed-ρ, 10,000-iteration cap) and is reported as unconverged rather than smoothed away.</a:t>
             </a:r>
           </a:p>
         </p:txBody>
@@ -41494,7 +41530,7 @@
                 </a:solidFill>
                 <a:latin typeface="Calibri"/>
               </a:rPr>
-              <a:t>methods with committed results: ADMM, PA-ADMM, SMO · pending: CVXPY, Pegasos</a:t>
+              <a:t>methods with committed results: ADMM, PA-ADMM, Pegasos, SMO</a:t>
             </a:r>
           </a:p>
         </p:txBody>
@@ -42201,7 +42237,7 @@
                 </a:solidFill>
                 <a:latin typeface="Calibri"/>
               </a:rPr>
-              <a:t>Pegasos and the CVXPY baseline are still pending; their cells are reported as skipped, not imputed.</a:t>
+              <a:t>All registered methods completed.</a:t>
             </a:r>
           </a:p>
         </p:txBody>
@@ -45702,7 +45738,7 @@
                 </a:solidFill>
                 <a:latin typeface="Calibri"/>
               </a:rPr>
-              <a:t>102 fits are recorded so far; pending: CVXPY, Pegasos. The capped-subset quality bars rest on a handful of test frauds, and all timings come from one single-threaded machine.</a:t>
+              <a:t>105 fits are recorded so far; pending: none. The capped-subset quality bars rest on a handful of test frauds, and all timings come from one single-threaded machine.</a:t>
             </a:r>
           </a:p>
         </p:txBody>

--- a/slides/COMP6704_Group4_PART_IV.pptx
+++ b/slides/COMP6704_Group4_PART_IV.pptx
@@ -4205,7 +4205,7 @@
           <a:lstStyle/>
           <a:p>
             <a:r>
-              <a:t>~45s: this slide answers 'are your solvers even correct?' — two independent algorithms agreeing to four decimals, plus each member's external reference check.</a:t>
+              <a:t>~45s: this slide answers 'are your solvers even correct?' — 3 independent algorithms agreeing to four decimals, plus each member's external reference check.</a:t>
             </a:r>
           </a:p>
         </p:txBody>
@@ -4345,7 +4345,7 @@
           <a:lstStyle/>
           <a:p>
             <a:r>
-              <a:t>~55s: this is the solver-ranking slide. Be careful in wording: differences in time-to-tolerance are not significant at 5 seeds, the reliable signal is convergence certification, especially at 50:1.</a:t>
+              <a:t>~55s: this is the solver-ranking slide. Two numbers matter: who reaches the 0.1% band at all (only the ADMM pair), and who can certify a solve at 50:1 (PA-ADMM 3/5, cold ADMM 0/5). Time-to-tolerance differences inside the band are not significant at 5 seeds.</a:t>
             </a:r>
           </a:p>
         </p:txBody>
@@ -4555,7 +4555,7 @@
           <a:lstStyle/>
           <a:p>
             <a:r>
-              <a:t>~55s: close on the honest framing. The contribution is the measurement protocol and the cost-aware comparison; a speed verdict waits for Pegasos and the CVXPY baseline, and for more seeds.</a:t>
+              <a:t>~55s: close on the honest framing. The contribution is the measurement protocol: same QP, same rows, same budget. The solvers separate on certified time-to-solution and on reliability, not on detection quality, and 5 seeds put a floor of 0.0625 on any paired p-value.</a:t>
             </a:r>
           </a:p>
         </p:txBody>
@@ -39694,7 +39694,7 @@
                 </a:solidFill>
                 <a:latin typeface="Calibri"/>
               </a:rPr>
-              <a:t>Generated 2026-10-27 11:00 from 105 recorded fits · results shown for ADMM, PA-ADMM, Pegasos, SMO</a:t>
+              <a:t>Generated 2026-10-27 14:43 from 136 recorded fits · results shown for ADMM, PA-ADMM, Pegasos, SMO</a:t>
             </a:r>
           </a:p>
         </p:txBody>
@@ -40740,7 +40740,7 @@
         <p:spPr>
           <a:xfrm>
             <a:off x="502920" y="1517904"/>
-            <a:ext cx="6309360" cy="2963487"/>
+            <a:ext cx="6309360" cy="2282992"/>
           </a:xfrm>
           <a:prstGeom prst="rect">
             <a:avLst/>
@@ -41103,7 +41103,7 @@
                 </a:solidFill>
                 <a:latin typeface="Calibri"/>
               </a:rPr>
-              <a:t>configs/correctness.yaml · results/raw/correctness · WP2 LIBSVM and WP3 CVXPY/ECOS cross-checks</a:t>
+              <a:t>configs/correctness.yaml · results/raw/correctness · external cross-checks run by WP2 (LIBSVM) and WP3 (CVXPY/ECOS), not by this harness</a:t>
             </a:r>
           </a:p>
         </p:txBody>
@@ -41268,7 +41268,7 @@
                 </a:solidFill>
                 <a:latin typeface="Calibri"/>
               </a:rPr>
-              <a:t>One 10k stratified subset (7,000 train / 1,500 val / 1,500 test), C fixed to 1, ratio 10:1, tolerance 1e-4. WP2 also checks SMO against LIBSVM and WP3 checks ADMM against CVXPY/ECOS on identical rows.</a:t>
+              <a:t>One 10k stratified subset (7,000 train / 1,500 val / 1,500 test), C fixed to 1, ratio 10:1, tolerance 1e-4. WP2 checks SMO against LIBSVM and WP3 checks ADMM against CVXPY/ECOS on identical rows, in their own runners.</a:t>
             </a:r>
           </a:p>
           <a:p>
@@ -41292,7 +41292,7 @@
                 </a:solidFill>
                 <a:latin typeface="Calibri"/>
               </a:rPr>
-              <a:t>Pegasos did not certify in this configuration (cold fixed-ρ, 10,000-iteration cap) and is reported as unconverged rather than smoothed away.</a:t>
+              <a:t>Pegasos is reported as unconverged rather than smoothed away: a first-order method has no primal-dual certificate, so we never claim convergence for it.</a:t>
             </a:r>
           </a:p>
         </p:txBody>
@@ -41786,7 +41786,7 @@
                           </a:solidFill>
                           <a:latin typeface="Calibri"/>
                         </a:rPr>
-                        <a:t>SMO: 1 · ADMM: 1 · PA-ADMM: 1</a:t>
+                        <a:t>SMO: 1 · Pegasos: 1 · ADMM: 1 · PA-ADMM: 1</a:t>
                       </a:r>
                     </a:p>
                   </a:txBody>
@@ -41898,7 +41898,7 @@
                           </a:solidFill>
                           <a:latin typeface="Calibri"/>
                         </a:rPr>
-                        <a:t>SMO: 9 · ADMM: 9 · PA-ADMM: 9</a:t>
+                        <a:t>SMO: 9 · Pegasos: 9 · ADMM: 9 · PA-ADMM: 9</a:t>
                       </a:r>
                     </a:p>
                   </a:txBody>
@@ -41920,7 +41920,7 @@
                           </a:solidFill>
                           <a:latin typeface="Calibri"/>
                         </a:rPr>
-                        <a:t>18</a:t>
+                        <a:t>27</a:t>
                       </a:r>
                     </a:p>
                   </a:txBody>
@@ -42010,7 +42010,7 @@
                           </a:solidFill>
                           <a:latin typeface="Calibri"/>
                         </a:rPr>
-                        <a:t>SMO: 9 · ADMM: 9 · PA-ADMM: 9</a:t>
+                        <a:t>SMO: 9 · Pegasos: 9 · ADMM: 9 · PA-ADMM: 9</a:t>
                       </a:r>
                     </a:p>
                   </a:txBody>
@@ -42032,7 +42032,7 @@
                           </a:solidFill>
                           <a:latin typeface="Calibri"/>
                         </a:rPr>
-                        <a:t>18</a:t>
+                        <a:t>27</a:t>
                       </a:r>
                     </a:p>
                   </a:txBody>
@@ -42122,7 +42122,7 @@
                           </a:solidFill>
                           <a:latin typeface="Calibri"/>
                         </a:rPr>
-                        <a:t>SMO: 15 · ADMM: 15 · PA-ADMM: 15</a:t>
+                        <a:t>SMO: 15 · Pegasos: 15 · ADMM: 15 · PA-ADMM: 15</a:t>
                       </a:r>
                     </a:p>
                   </a:txBody>
@@ -42144,7 +42144,7 @@
                           </a:solidFill>
                           <a:latin typeface="Calibri"/>
                         </a:rPr>
-                        <a:t>30</a:t>
+                        <a:t>45</a:t>
                       </a:r>
                     </a:p>
                   </a:txBody>
@@ -42237,7 +42237,7 @@
                 </a:solidFill>
                 <a:latin typeface="Calibri"/>
               </a:rPr>
-              <a:t>All registered methods completed.</a:t>
+              <a:t>All four registered solvers have recorded runs here; incomplete cells are stated on the results slides.</a:t>
             </a:r>
           </a:p>
         </p:txBody>
@@ -42396,7 +42396,7 @@
                 </a:solidFill>
                 <a:latin typeface="Calibri"/>
               </a:rPr>
-              <a:t>Reaching tolerance is minutes apart; certifying the optimum is where methods diverge</a:t>
+              <a:t>Only ADMM and PA-ADMM reach the band; certifying seeds is where they diverge</a:t>
             </a:r>
           </a:p>
         </p:txBody>
@@ -42532,7 +42532,7 @@
         <p:spPr>
           <a:xfrm>
             <a:off x="502920" y="1481328"/>
-            <a:ext cx="10607040" cy="2419149"/>
+            <a:ext cx="10607040" cy="2512194"/>
           </a:xfrm>
           <a:prstGeom prst="rect">
             <a:avLst/>
@@ -42569,7 +42569,7 @@
                 </a:solidFill>
                 <a:latin typeface="Calibri"/>
               </a:rPr>
-              <a:t>At 20:1 on the full data, median time-to-tolerance: ADMM 43s, PA-ADMM 49s. SMO never reached the tolerance at 20:1. Final fit time is dominated by iterating past the tolerance line until the solver's own certificate (KKT / residual + duality gap) is satisfied.</a:t>
+              <a:t>At 20:1 on the full data, median time-to-tolerance: ADMM 43s, PA-ADMM 49s. SMO and Pegasos never reached the tolerance at 20:1. ADMM and PA-ADMM keep iterating past the tolerance until their own certificate is met; SMO stops at its 100k-update cap and Pegasos at its 5,000-epoch cap, which is why neither enters the band.</a:t>
             </a:r>
           </a:p>
           <a:p>
@@ -42581,7 +42581,7 @@
                 </a:solidFill>
                 <a:latin typeface="Calibri"/>
               </a:rPr>
-              <a:t>Right panel counts certified seeds at the hardest ratio 50:1 → ADMM 0/5, PA-ADMM 3/5, SMO 0/5. Pushing Cᵢ higher makes the QP stiffer; PA-ADMM certifies the most seeds there. SMO exhausted its own 100,000-update limit on 15 of 15 main_full fits after 1393s of a 5400s budget (7/9 already at 35k), finishing 1.6% above the group-best objective. We keep its default cap and report this as a scalability limit of SMO under this protocol, not a wall-clock timeout.</a:t>
+              <a:t>Right panel counts certified seeds at the hardest ratio 50:1 → ADMM 0/5, PA-ADMM 3/5, Pegasos 0/5, SMO 0/5. Pushing Cᵢ higher makes the QP stiffer; PA-ADMM certifies the most seeds there. SMO exhausted its own 100,000-update limit on 15 of 15 main_full fits after 1393s of a 5400s budget (7/9 already at 35k), finishing 1.6% above the group-best objective. We keep its default cap and report this as a scalability limit of SMO under this protocol, not a wall-clock timeout.</a:t>
             </a:r>
           </a:p>
         </p:txBody>
@@ -42869,7 +42869,7 @@
         </p:nvGraphicFramePr>
         <p:xfrm>
           <a:off x="530352" y="1536192"/>
-          <a:ext cx="10515597" cy="3108960"/>
+          <a:ext cx="10515597" cy="3671315"/>
         </p:xfrm>
         <a:graphic>
           <a:graphicData uri="http://schemas.openxmlformats.org/drawingml/2006/table">
@@ -42887,14 +42887,14 @@
                 <a:gridCol w="1783896"/>
                 <a:gridCol w="1408339"/>
               </a:tblGrid>
-              <a:tr h="310896">
+              <a:tr h="282408">
                 <a:tc>
                   <a:txBody>
                     <a:bodyPr wrap="square"/>
                     <a:lstStyle/>
                     <a:p>
                       <a:r>
-                        <a:rPr sz="1100" b="1">
+                        <a:rPr sz="1050" b="1">
                           <a:solidFill>
                             <a:srgbClr val="FFFFFF"/>
                           </a:solidFill>
@@ -42916,7 +42916,7 @@
                     <a:lstStyle/>
                     <a:p>
                       <a:r>
-                        <a:rPr sz="1100" b="1">
+                        <a:rPr sz="1050" b="1">
                           <a:solidFill>
                             <a:srgbClr val="FFFFFF"/>
                           </a:solidFill>
@@ -42938,7 +42938,7 @@
                     <a:lstStyle/>
                     <a:p>
                       <a:r>
-                        <a:rPr sz="1100" b="1">
+                        <a:rPr sz="1050" b="1">
                           <a:solidFill>
                             <a:srgbClr val="FFFFFF"/>
                           </a:solidFill>
@@ -42960,7 +42960,7 @@
                     <a:lstStyle/>
                     <a:p>
                       <a:r>
-                        <a:rPr sz="1100" b="1">
+                        <a:rPr sz="1050" b="1">
                           <a:solidFill>
                             <a:srgbClr val="FFFFFF"/>
                           </a:solidFill>
@@ -42982,7 +42982,7 @@
                     <a:lstStyle/>
                     <a:p>
                       <a:r>
-                        <a:rPr sz="1100" b="1">
+                        <a:rPr sz="1050" b="1">
                           <a:solidFill>
                             <a:srgbClr val="FFFFFF"/>
                           </a:solidFill>
@@ -43004,7 +43004,7 @@
                     <a:lstStyle/>
                     <a:p>
                       <a:r>
-                        <a:rPr sz="1100" b="1">
+                        <a:rPr sz="1050" b="1">
                           <a:solidFill>
                             <a:srgbClr val="FFFFFF"/>
                           </a:solidFill>
@@ -43026,7 +43026,7 @@
                     <a:lstStyle/>
                     <a:p>
                       <a:r>
-                        <a:rPr sz="1100" b="1">
+                        <a:rPr sz="1050" b="1">
                           <a:solidFill>
                             <a:srgbClr val="FFFFFF"/>
                           </a:solidFill>
@@ -43048,7 +43048,7 @@
                     <a:lstStyle/>
                     <a:p>
                       <a:r>
-                        <a:rPr sz="1100" b="1">
+                        <a:rPr sz="1050" b="1">
                           <a:solidFill>
                             <a:srgbClr val="FFFFFF"/>
                           </a:solidFill>
@@ -43065,14 +43065,14 @@
                   </a:tcPr>
                 </a:tc>
               </a:tr>
-              <a:tr h="310896">
+              <a:tr h="282408">
                 <a:tc>
                   <a:txBody>
                     <a:bodyPr wrap="square"/>
                     <a:lstStyle/>
                     <a:p>
                       <a:r>
-                        <a:rPr sz="1100" b="0">
+                        <a:rPr sz="1050" b="0">
                           <a:solidFill>
                             <a:srgbClr val="182B3A"/>
                           </a:solidFill>
@@ -43094,7 +43094,7 @@
                     <a:lstStyle/>
                     <a:p>
                       <a:r>
-                        <a:rPr sz="1100" b="0">
+                        <a:rPr sz="1050" b="0">
                           <a:solidFill>
                             <a:srgbClr val="182B3A"/>
                           </a:solidFill>
@@ -43116,7 +43116,7 @@
                     <a:lstStyle/>
                     <a:p>
                       <a:r>
-                        <a:rPr sz="1100" b="0">
+                        <a:rPr sz="1050" b="0">
                           <a:solidFill>
                             <a:srgbClr val="182B3A"/>
                           </a:solidFill>
@@ -43138,7 +43138,7 @@
                     <a:lstStyle/>
                     <a:p>
                       <a:r>
-                        <a:rPr sz="1100" b="0">
+                        <a:rPr sz="1050" b="0">
                           <a:solidFill>
                             <a:srgbClr val="182B3A"/>
                           </a:solidFill>
@@ -43160,7 +43160,7 @@
                     <a:lstStyle/>
                     <a:p>
                       <a:r>
-                        <a:rPr sz="1100" b="0">
+                        <a:rPr sz="1050" b="0">
                           <a:solidFill>
                             <a:srgbClr val="182B3A"/>
                           </a:solidFill>
@@ -43182,7 +43182,7 @@
                     <a:lstStyle/>
                     <a:p>
                       <a:r>
-                        <a:rPr sz="1100" b="0">
+                        <a:rPr sz="1050" b="0">
                           <a:solidFill>
                             <a:srgbClr val="182B3A"/>
                           </a:solidFill>
@@ -43204,7 +43204,7 @@
                     <a:lstStyle/>
                     <a:p>
                       <a:r>
-                        <a:rPr sz="1100" b="0">
+                        <a:rPr sz="1050" b="0">
                           <a:solidFill>
                             <a:srgbClr val="182B3A"/>
                           </a:solidFill>
@@ -43226,7 +43226,7 @@
                     <a:lstStyle/>
                     <a:p>
                       <a:r>
-                        <a:rPr sz="1100" b="0">
+                        <a:rPr sz="1050" b="0">
                           <a:solidFill>
                             <a:srgbClr val="182B3A"/>
                           </a:solidFill>
@@ -43243,20 +43243,20 @@
                   </a:tcPr>
                 </a:tc>
               </a:tr>
-              <a:tr h="310896">
+              <a:tr h="282408">
                 <a:tc>
                   <a:txBody>
                     <a:bodyPr wrap="square"/>
                     <a:lstStyle/>
                     <a:p>
                       <a:r>
-                        <a:rPr sz="1100" b="0">
+                        <a:rPr sz="1050" b="0">
                           <a:solidFill>
                             <a:srgbClr val="182B3A"/>
                           </a:solidFill>
                           <a:latin typeface="Calibri"/>
                         </a:rPr>
-                        <a:t>ADMM</a:t>
+                        <a:t>Pegasos</a:t>
                       </a:r>
                     </a:p>
                   </a:txBody>
@@ -43272,7 +43272,7 @@
                     <a:lstStyle/>
                     <a:p>
                       <a:r>
-                        <a:rPr sz="1100" b="0">
+                        <a:rPr sz="1050" b="0">
                           <a:solidFill>
                             <a:srgbClr val="182B3A"/>
                           </a:solidFill>
@@ -43294,7 +43294,363 @@
                     <a:lstStyle/>
                     <a:p>
                       <a:r>
-                        <a:rPr sz="1100" b="0">
+                        <a:rPr sz="1050" b="0">
+                          <a:solidFill>
+                            <a:srgbClr val="182B3A"/>
+                          </a:solidFill>
+                          <a:latin typeface="Calibri"/>
+                        </a:rPr>
+                        <a:t>0/5</a:t>
+                      </a:r>
+                    </a:p>
+                  </a:txBody>
+                  <a:tcPr marL="54864" marR="36576" marT="18288" marB="18288">
+                    <a:solidFill>
+                      <a:srgbClr val="F2F4F6"/>
+                    </a:solidFill>
+                  </a:tcPr>
+                </a:tc>
+                <a:tc>
+                  <a:txBody>
+                    <a:bodyPr wrap="square"/>
+                    <a:lstStyle/>
+                    <a:p>
+                      <a:r>
+                        <a:rPr sz="1050" b="0">
+                          <a:solidFill>
+                            <a:srgbClr val="182B3A"/>
+                          </a:solidFill>
+                          <a:latin typeface="Calibri"/>
+                        </a:rPr>
+                        <a:t>n/a</a:t>
+                      </a:r>
+                    </a:p>
+                  </a:txBody>
+                  <a:tcPr marL="54864" marR="36576" marT="18288" marB="18288">
+                    <a:solidFill>
+                      <a:srgbClr val="F2F4F6"/>
+                    </a:solidFill>
+                  </a:tcPr>
+                </a:tc>
+                <a:tc>
+                  <a:txBody>
+                    <a:bodyPr wrap="square"/>
+                    <a:lstStyle/>
+                    <a:p>
+                      <a:r>
+                        <a:rPr sz="1050" b="0">
+                          <a:solidFill>
+                            <a:srgbClr val="182B3A"/>
+                          </a:solidFill>
+                          <a:latin typeface="Calibri"/>
+                        </a:rPr>
+                        <a:t>688</a:t>
+                      </a:r>
+                    </a:p>
+                  </a:txBody>
+                  <a:tcPr marL="54864" marR="36576" marT="18288" marB="18288">
+                    <a:solidFill>
+                      <a:srgbClr val="F2F4F6"/>
+                    </a:solidFill>
+                  </a:tcPr>
+                </a:tc>
+                <a:tc>
+                  <a:txBody>
+                    <a:bodyPr wrap="square"/>
+                    <a:lstStyle/>
+                    <a:p>
+                      <a:r>
+                        <a:rPr sz="1050" b="0">
+                          <a:solidFill>
+                            <a:srgbClr val="182B3A"/>
+                          </a:solidFill>
+                          <a:latin typeface="Calibri"/>
+                        </a:rPr>
+                        <a:t>1876.7</a:t>
+                      </a:r>
+                    </a:p>
+                  </a:txBody>
+                  <a:tcPr marL="54864" marR="36576" marT="18288" marB="18288">
+                    <a:solidFill>
+                      <a:srgbClr val="F2F4F6"/>
+                    </a:solidFill>
+                  </a:tcPr>
+                </a:tc>
+                <a:tc>
+                  <a:txBody>
+                    <a:bodyPr wrap="square"/>
+                    <a:lstStyle/>
+                    <a:p>
+                      <a:r>
+                        <a:rPr sz="1050" b="0">
+                          <a:solidFill>
+                            <a:srgbClr val="182B3A"/>
+                          </a:solidFill>
+                          <a:latin typeface="Calibri"/>
+                        </a:rPr>
+                        <a:t>0.75 ± 0.05</a:t>
+                      </a:r>
+                    </a:p>
+                  </a:txBody>
+                  <a:tcPr marL="54864" marR="36576" marT="18288" marB="18288">
+                    <a:solidFill>
+                      <a:srgbClr val="F2F4F6"/>
+                    </a:solidFill>
+                  </a:tcPr>
+                </a:tc>
+                <a:tc>
+                  <a:txBody>
+                    <a:bodyPr wrap="square"/>
+                    <a:lstStyle/>
+                    <a:p>
+                      <a:r>
+                        <a:rPr sz="1050" b="0">
+                          <a:solidFill>
+                            <a:srgbClr val="182B3A"/>
+                          </a:solidFill>
+                          <a:latin typeface="Calibri"/>
+                        </a:rPr>
+                        <a:t>0.00341</a:t>
+                      </a:r>
+                    </a:p>
+                  </a:txBody>
+                  <a:tcPr marL="54864" marR="36576" marT="18288" marB="18288">
+                    <a:solidFill>
+                      <a:srgbClr val="F2F4F6"/>
+                    </a:solidFill>
+                  </a:tcPr>
+                </a:tc>
+              </a:tr>
+              <a:tr h="282408">
+                <a:tc>
+                  <a:txBody>
+                    <a:bodyPr wrap="square"/>
+                    <a:lstStyle/>
+                    <a:p>
+                      <a:r>
+                        <a:rPr sz="1050" b="0">
+                          <a:solidFill>
+                            <a:srgbClr val="182B3A"/>
+                          </a:solidFill>
+                          <a:latin typeface="Calibri"/>
+                        </a:rPr>
+                        <a:t>ADMM</a:t>
+                      </a:r>
+                    </a:p>
+                  </a:txBody>
+                  <a:tcPr marL="54864" marR="36576" marT="18288" marB="18288">
+                    <a:solidFill>
+                      <a:srgbClr val="FFFFFF"/>
+                    </a:solidFill>
+                  </a:tcPr>
+                </a:tc>
+                <a:tc>
+                  <a:txBody>
+                    <a:bodyPr wrap="square"/>
+                    <a:lstStyle/>
+                    <a:p>
+                      <a:r>
+                        <a:rPr sz="1050" b="0">
+                          <a:solidFill>
+                            <a:srgbClr val="182B3A"/>
+                          </a:solidFill>
+                          <a:latin typeface="Calibri"/>
+                        </a:rPr>
+                        <a:t>10:1</a:t>
+                      </a:r>
+                    </a:p>
+                  </a:txBody>
+                  <a:tcPr marL="54864" marR="36576" marT="18288" marB="18288">
+                    <a:solidFill>
+                      <a:srgbClr val="FFFFFF"/>
+                    </a:solidFill>
+                  </a:tcPr>
+                </a:tc>
+                <a:tc>
+                  <a:txBody>
+                    <a:bodyPr wrap="square"/>
+                    <a:lstStyle/>
+                    <a:p>
+                      <a:r>
+                        <a:rPr sz="1050" b="0">
+                          <a:solidFill>
+                            <a:srgbClr val="182B3A"/>
+                          </a:solidFill>
+                          <a:latin typeface="Calibri"/>
+                        </a:rPr>
+                        <a:t>4/5</a:t>
+                      </a:r>
+                    </a:p>
+                  </a:txBody>
+                  <a:tcPr marL="54864" marR="36576" marT="18288" marB="18288">
+                    <a:solidFill>
+                      <a:srgbClr val="FFFFFF"/>
+                    </a:solidFill>
+                  </a:tcPr>
+                </a:tc>
+                <a:tc>
+                  <a:txBody>
+                    <a:bodyPr wrap="square"/>
+                    <a:lstStyle/>
+                    <a:p>
+                      <a:r>
+                        <a:rPr sz="1050" b="0">
+                          <a:solidFill>
+                            <a:srgbClr val="182B3A"/>
+                          </a:solidFill>
+                          <a:latin typeface="Calibri"/>
+                        </a:rPr>
+                        <a:t>44</a:t>
+                      </a:r>
+                    </a:p>
+                  </a:txBody>
+                  <a:tcPr marL="54864" marR="36576" marT="18288" marB="18288">
+                    <a:solidFill>
+                      <a:srgbClr val="FFFFFF"/>
+                    </a:solidFill>
+                  </a:tcPr>
+                </a:tc>
+                <a:tc>
+                  <a:txBody>
+                    <a:bodyPr wrap="square"/>
+                    <a:lstStyle/>
+                    <a:p>
+                      <a:r>
+                        <a:rPr sz="1050" b="0">
+                          <a:solidFill>
+                            <a:srgbClr val="182B3A"/>
+                          </a:solidFill>
+                          <a:latin typeface="Calibri"/>
+                        </a:rPr>
+                        <a:t>411</a:t>
+                      </a:r>
+                    </a:p>
+                  </a:txBody>
+                  <a:tcPr marL="54864" marR="36576" marT="18288" marB="18288">
+                    <a:solidFill>
+                      <a:srgbClr val="FFFFFF"/>
+                    </a:solidFill>
+                  </a:tcPr>
+                </a:tc>
+                <a:tc>
+                  <a:txBody>
+                    <a:bodyPr wrap="square"/>
+                    <a:lstStyle/>
+                    <a:p>
+                      <a:r>
+                        <a:rPr sz="1050" b="0">
+                          <a:solidFill>
+                            <a:srgbClr val="182B3A"/>
+                          </a:solidFill>
+                          <a:latin typeface="Calibri"/>
+                        </a:rPr>
+                        <a:t>1584.1</a:t>
+                      </a:r>
+                    </a:p>
+                  </a:txBody>
+                  <a:tcPr marL="54864" marR="36576" marT="18288" marB="18288">
+                    <a:solidFill>
+                      <a:srgbClr val="FFFFFF"/>
+                    </a:solidFill>
+                  </a:tcPr>
+                </a:tc>
+                <a:tc>
+                  <a:txBody>
+                    <a:bodyPr wrap="square"/>
+                    <a:lstStyle/>
+                    <a:p>
+                      <a:r>
+                        <a:rPr sz="1050" b="0">
+                          <a:solidFill>
+                            <a:srgbClr val="182B3A"/>
+                          </a:solidFill>
+                          <a:latin typeface="Calibri"/>
+                        </a:rPr>
+                        <a:t>0.75 ± 0.05</a:t>
+                      </a:r>
+                    </a:p>
+                  </a:txBody>
+                  <a:tcPr marL="54864" marR="36576" marT="18288" marB="18288">
+                    <a:solidFill>
+                      <a:srgbClr val="FFFFFF"/>
+                    </a:solidFill>
+                  </a:tcPr>
+                </a:tc>
+                <a:tc>
+                  <a:txBody>
+                    <a:bodyPr wrap="square"/>
+                    <a:lstStyle/>
+                    <a:p>
+                      <a:r>
+                        <a:rPr sz="1050" b="0">
+                          <a:solidFill>
+                            <a:srgbClr val="182B3A"/>
+                          </a:solidFill>
+                          <a:latin typeface="Calibri"/>
+                        </a:rPr>
+                        <a:t>0.00380</a:t>
+                      </a:r>
+                    </a:p>
+                  </a:txBody>
+                  <a:tcPr marL="54864" marR="36576" marT="18288" marB="18288">
+                    <a:solidFill>
+                      <a:srgbClr val="FFFFFF"/>
+                    </a:solidFill>
+                  </a:tcPr>
+                </a:tc>
+              </a:tr>
+              <a:tr h="282408">
+                <a:tc>
+                  <a:txBody>
+                    <a:bodyPr wrap="square"/>
+                    <a:lstStyle/>
+                    <a:p>
+                      <a:r>
+                        <a:rPr sz="1050" b="0">
+                          <a:solidFill>
+                            <a:srgbClr val="182B3A"/>
+                          </a:solidFill>
+                          <a:latin typeface="Calibri"/>
+                        </a:rPr>
+                        <a:t>PA-ADMM</a:t>
+                      </a:r>
+                    </a:p>
+                  </a:txBody>
+                  <a:tcPr marL="54864" marR="36576" marT="18288" marB="18288">
+                    <a:solidFill>
+                      <a:srgbClr val="F2F4F6"/>
+                    </a:solidFill>
+                  </a:tcPr>
+                </a:tc>
+                <a:tc>
+                  <a:txBody>
+                    <a:bodyPr wrap="square"/>
+                    <a:lstStyle/>
+                    <a:p>
+                      <a:r>
+                        <a:rPr sz="1050" b="0">
+                          <a:solidFill>
+                            <a:srgbClr val="182B3A"/>
+                          </a:solidFill>
+                          <a:latin typeface="Calibri"/>
+                        </a:rPr>
+                        <a:t>10:1</a:t>
+                      </a:r>
+                    </a:p>
+                  </a:txBody>
+                  <a:tcPr marL="54864" marR="36576" marT="18288" marB="18288">
+                    <a:solidFill>
+                      <a:srgbClr val="F2F4F6"/>
+                    </a:solidFill>
+                  </a:tcPr>
+                </a:tc>
+                <a:tc>
+                  <a:txBody>
+                    <a:bodyPr wrap="square"/>
+                    <a:lstStyle/>
+                    <a:p>
+                      <a:r>
+                        <a:rPr sz="1050" b="0">
                           <a:solidFill>
                             <a:srgbClr val="182B3A"/>
                           </a:solidFill>
@@ -43316,13 +43672,13 @@
                     <a:lstStyle/>
                     <a:p>
                       <a:r>
-                        <a:rPr sz="1100" b="0">
+                        <a:rPr sz="1050" b="0">
                           <a:solidFill>
                             <a:srgbClr val="182B3A"/>
                           </a:solidFill>
                           <a:latin typeface="Calibri"/>
                         </a:rPr>
-                        <a:t>44</a:t>
+                        <a:t>48</a:t>
                       </a:r>
                     </a:p>
                   </a:txBody>
@@ -43338,13 +43694,13 @@
                     <a:lstStyle/>
                     <a:p>
                       <a:r>
-                        <a:rPr sz="1100" b="0">
+                        <a:rPr sz="1050" b="0">
                           <a:solidFill>
                             <a:srgbClr val="182B3A"/>
                           </a:solidFill>
                           <a:latin typeface="Calibri"/>
                         </a:rPr>
-                        <a:t>411</a:t>
+                        <a:t>500</a:t>
                       </a:r>
                     </a:p>
                   </a:txBody>
@@ -43360,7 +43716,7 @@
                     <a:lstStyle/>
                     <a:p>
                       <a:r>
-                        <a:rPr sz="1100" b="0">
+                        <a:rPr sz="1050" b="0">
                           <a:solidFill>
                             <a:srgbClr val="182B3A"/>
                           </a:solidFill>
@@ -43382,7 +43738,7 @@
                     <a:lstStyle/>
                     <a:p>
                       <a:r>
-                        <a:rPr sz="1100" b="0">
+                        <a:rPr sz="1050" b="0">
                           <a:solidFill>
                             <a:srgbClr val="182B3A"/>
                           </a:solidFill>
@@ -43404,13 +43760,13 @@
                     <a:lstStyle/>
                     <a:p>
                       <a:r>
-                        <a:rPr sz="1100" b="0">
+                        <a:rPr sz="1050" b="0">
                           <a:solidFill>
                             <a:srgbClr val="182B3A"/>
                           </a:solidFill>
                           <a:latin typeface="Calibri"/>
                         </a:rPr>
-                        <a:t>0.00380</a:t>
+                        <a:t>0.00385</a:t>
                       </a:r>
                     </a:p>
                   </a:txBody>
@@ -43421,20 +43777,20 @@
                   </a:tcPr>
                 </a:tc>
               </a:tr>
-              <a:tr h="310896">
+              <a:tr h="282408">
                 <a:tc>
                   <a:txBody>
                     <a:bodyPr wrap="square"/>
                     <a:lstStyle/>
                     <a:p>
                       <a:r>
-                        <a:rPr sz="1100" b="0">
+                        <a:rPr sz="1050" b="0">
                           <a:solidFill>
                             <a:srgbClr val="182B3A"/>
                           </a:solidFill>
                           <a:latin typeface="Calibri"/>
                         </a:rPr>
-                        <a:t>PA-ADMM</a:t>
+                        <a:t>SMO</a:t>
                       </a:r>
                     </a:p>
                   </a:txBody>
@@ -43450,13 +43806,13 @@
                     <a:lstStyle/>
                     <a:p>
                       <a:r>
-                        <a:rPr sz="1100" b="0">
+                        <a:rPr sz="1050" b="0">
                           <a:solidFill>
                             <a:srgbClr val="182B3A"/>
                           </a:solidFill>
                           <a:latin typeface="Calibri"/>
                         </a:rPr>
-                        <a:t>10:1</a:t>
+                        <a:t>20:1</a:t>
                       </a:r>
                     </a:p>
                   </a:txBody>
@@ -43472,13 +43828,13 @@
                     <a:lstStyle/>
                     <a:p>
                       <a:r>
-                        <a:rPr sz="1100" b="0">
+                        <a:rPr sz="1050" b="0">
                           <a:solidFill>
                             <a:srgbClr val="182B3A"/>
                           </a:solidFill>
                           <a:latin typeface="Calibri"/>
                         </a:rPr>
-                        <a:t>4/5</a:t>
+                        <a:t>0/5</a:t>
                       </a:r>
                     </a:p>
                   </a:txBody>
@@ -43494,13 +43850,13 @@
                     <a:lstStyle/>
                     <a:p>
                       <a:r>
-                        <a:rPr sz="1100" b="0">
+                        <a:rPr sz="1050" b="0">
                           <a:solidFill>
                             <a:srgbClr val="182B3A"/>
                           </a:solidFill>
                           <a:latin typeface="Calibri"/>
                         </a:rPr>
-                        <a:t>48</a:t>
+                        <a:t>n/a</a:t>
                       </a:r>
                     </a:p>
                   </a:txBody>
@@ -43516,13 +43872,13 @@
                     <a:lstStyle/>
                     <a:p>
                       <a:r>
-                        <a:rPr sz="1100" b="0">
+                        <a:rPr sz="1050" b="0">
                           <a:solidFill>
                             <a:srgbClr val="182B3A"/>
                           </a:solidFill>
                           <a:latin typeface="Calibri"/>
                         </a:rPr>
-                        <a:t>500</a:t>
+                        <a:t>1373</a:t>
                       </a:r>
                     </a:p>
                   </a:txBody>
@@ -43538,13 +43894,13 @@
                     <a:lstStyle/>
                     <a:p>
                       <a:r>
-                        <a:rPr sz="1100" b="0">
+                        <a:rPr sz="1050" b="0">
                           <a:solidFill>
                             <a:srgbClr val="182B3A"/>
                           </a:solidFill>
                           <a:latin typeface="Calibri"/>
                         </a:rPr>
-                        <a:t>1584.1</a:t>
+                        <a:t>2911.8</a:t>
                       </a:r>
                     </a:p>
                   </a:txBody>
@@ -43560,13 +43916,13 @@
                     <a:lstStyle/>
                     <a:p>
                       <a:r>
-                        <a:rPr sz="1100" b="0">
+                        <a:rPr sz="1050" b="0">
                           <a:solidFill>
                             <a:srgbClr val="182B3A"/>
                           </a:solidFill>
                           <a:latin typeface="Calibri"/>
                         </a:rPr>
-                        <a:t>0.75 ± 0.05</a:t>
+                        <a:t>0.76 ± 0.05</a:t>
                       </a:r>
                     </a:p>
                   </a:txBody>
@@ -43582,13 +43938,13 @@
                     <a:lstStyle/>
                     <a:p>
                       <a:r>
-                        <a:rPr sz="1100" b="0">
+                        <a:rPr sz="1050" b="0">
                           <a:solidFill>
                             <a:srgbClr val="182B3A"/>
                           </a:solidFill>
                           <a:latin typeface="Calibri"/>
                         </a:rPr>
-                        <a:t>0.00385</a:t>
+                        <a:t>0.00681</a:t>
                       </a:r>
                     </a:p>
                   </a:txBody>
@@ -43599,20 +43955,20 @@
                   </a:tcPr>
                 </a:tc>
               </a:tr>
-              <a:tr h="310896">
+              <a:tr h="282408">
                 <a:tc>
                   <a:txBody>
                     <a:bodyPr wrap="square"/>
                     <a:lstStyle/>
                     <a:p>
                       <a:r>
-                        <a:rPr sz="1100" b="0">
+                        <a:rPr sz="1050" b="0">
                           <a:solidFill>
                             <a:srgbClr val="182B3A"/>
                           </a:solidFill>
                           <a:latin typeface="Calibri"/>
                         </a:rPr>
-                        <a:t>SMO</a:t>
+                        <a:t>Pegasos</a:t>
                       </a:r>
                     </a:p>
                   </a:txBody>
@@ -43628,7 +43984,7 @@
                     <a:lstStyle/>
                     <a:p>
                       <a:r>
-                        <a:rPr sz="1100" b="0">
+                        <a:rPr sz="1050" b="0">
                           <a:solidFill>
                             <a:srgbClr val="182B3A"/>
                           </a:solidFill>
@@ -43650,7 +44006,7 @@
                     <a:lstStyle/>
                     <a:p>
                       <a:r>
-                        <a:rPr sz="1100" b="0">
+                        <a:rPr sz="1050" b="0">
                           <a:solidFill>
                             <a:srgbClr val="182B3A"/>
                           </a:solidFill>
@@ -43672,7 +44028,7 @@
                     <a:lstStyle/>
                     <a:p>
                       <a:r>
-                        <a:rPr sz="1100" b="0">
+                        <a:rPr sz="1050" b="0">
                           <a:solidFill>
                             <a:srgbClr val="182B3A"/>
                           </a:solidFill>
@@ -43694,13 +44050,13 @@
                     <a:lstStyle/>
                     <a:p>
                       <a:r>
-                        <a:rPr sz="1100" b="0">
+                        <a:rPr sz="1050" b="0">
                           <a:solidFill>
                             <a:srgbClr val="182B3A"/>
                           </a:solidFill>
                           <a:latin typeface="Calibri"/>
                         </a:rPr>
-                        <a:t>1373</a:t>
+                        <a:t>726</a:t>
                       </a:r>
                     </a:p>
                   </a:txBody>
@@ -43716,13 +44072,13 @@
                     <a:lstStyle/>
                     <a:p>
                       <a:r>
-                        <a:rPr sz="1100" b="0">
+                        <a:rPr sz="1050" b="0">
                           <a:solidFill>
                             <a:srgbClr val="182B3A"/>
                           </a:solidFill>
                           <a:latin typeface="Calibri"/>
                         </a:rPr>
-                        <a:t>2911.8</a:t>
+                        <a:t>3633.3</a:t>
                       </a:r>
                     </a:p>
                   </a:txBody>
@@ -43738,7 +44094,7 @@
                     <a:lstStyle/>
                     <a:p>
                       <a:r>
-                        <a:rPr sz="1100" b="0">
+                        <a:rPr sz="1050" b="0">
                           <a:solidFill>
                             <a:srgbClr val="182B3A"/>
                           </a:solidFill>
@@ -43760,13 +44116,13 @@
                     <a:lstStyle/>
                     <a:p>
                       <a:r>
-                        <a:rPr sz="1100" b="0">
+                        <a:rPr sz="1050" b="0">
                           <a:solidFill>
                             <a:srgbClr val="182B3A"/>
                           </a:solidFill>
                           <a:latin typeface="Calibri"/>
                         </a:rPr>
-                        <a:t>0.00681</a:t>
+                        <a:t>0.00623</a:t>
                       </a:r>
                     </a:p>
                   </a:txBody>
@@ -43777,14 +44133,14 @@
                   </a:tcPr>
                 </a:tc>
               </a:tr>
-              <a:tr h="310896">
+              <a:tr h="282408">
                 <a:tc>
                   <a:txBody>
                     <a:bodyPr wrap="square"/>
                     <a:lstStyle/>
                     <a:p>
                       <a:r>
-                        <a:rPr sz="1100" b="0">
+                        <a:rPr sz="1050" b="0">
                           <a:solidFill>
                             <a:srgbClr val="182B3A"/>
                           </a:solidFill>
@@ -43806,7 +44162,7 @@
                     <a:lstStyle/>
                     <a:p>
                       <a:r>
-                        <a:rPr sz="1100" b="0">
+                        <a:rPr sz="1050" b="0">
                           <a:solidFill>
                             <a:srgbClr val="182B3A"/>
                           </a:solidFill>
@@ -43828,7 +44184,7 @@
                     <a:lstStyle/>
                     <a:p>
                       <a:r>
-                        <a:rPr sz="1100" b="0">
+                        <a:rPr sz="1050" b="0">
                           <a:solidFill>
                             <a:srgbClr val="182B3A"/>
                           </a:solidFill>
@@ -43850,7 +44206,7 @@
                     <a:lstStyle/>
                     <a:p>
                       <a:r>
-                        <a:rPr sz="1100" b="0">
+                        <a:rPr sz="1050" b="0">
                           <a:solidFill>
                             <a:srgbClr val="182B3A"/>
                           </a:solidFill>
@@ -43872,7 +44228,7 @@
                     <a:lstStyle/>
                     <a:p>
                       <a:r>
-                        <a:rPr sz="1100" b="0">
+                        <a:rPr sz="1050" b="0">
                           <a:solidFill>
                             <a:srgbClr val="182B3A"/>
                           </a:solidFill>
@@ -43894,7 +44250,7 @@
                     <a:lstStyle/>
                     <a:p>
                       <a:r>
-                        <a:rPr sz="1100" b="0">
+                        <a:rPr sz="1050" b="0">
                           <a:solidFill>
                             <a:srgbClr val="182B3A"/>
                           </a:solidFill>
@@ -43916,7 +44272,7 @@
                     <a:lstStyle/>
                     <a:p>
                       <a:r>
-                        <a:rPr sz="1100" b="0">
+                        <a:rPr sz="1050" b="0">
                           <a:solidFill>
                             <a:srgbClr val="182B3A"/>
                           </a:solidFill>
@@ -43938,7 +44294,7 @@
                     <a:lstStyle/>
                     <a:p>
                       <a:r>
-                        <a:rPr sz="1100" b="0">
+                        <a:rPr sz="1050" b="0">
                           <a:solidFill>
                             <a:srgbClr val="182B3A"/>
                           </a:solidFill>
@@ -43955,14 +44311,14 @@
                   </a:tcPr>
                 </a:tc>
               </a:tr>
-              <a:tr h="310896">
+              <a:tr h="282408">
                 <a:tc>
                   <a:txBody>
                     <a:bodyPr wrap="square"/>
                     <a:lstStyle/>
                     <a:p>
                       <a:r>
-                        <a:rPr sz="1100" b="0">
+                        <a:rPr sz="1050" b="0">
                           <a:solidFill>
                             <a:srgbClr val="182B3A"/>
                           </a:solidFill>
@@ -43984,7 +44340,7 @@
                     <a:lstStyle/>
                     <a:p>
                       <a:r>
-                        <a:rPr sz="1100" b="0">
+                        <a:rPr sz="1050" b="0">
                           <a:solidFill>
                             <a:srgbClr val="182B3A"/>
                           </a:solidFill>
@@ -44006,7 +44362,7 @@
                     <a:lstStyle/>
                     <a:p>
                       <a:r>
-                        <a:rPr sz="1100" b="0">
+                        <a:rPr sz="1050" b="0">
                           <a:solidFill>
                             <a:srgbClr val="182B3A"/>
                           </a:solidFill>
@@ -44028,7 +44384,7 @@
                     <a:lstStyle/>
                     <a:p>
                       <a:r>
-                        <a:rPr sz="1100" b="0">
+                        <a:rPr sz="1050" b="0">
                           <a:solidFill>
                             <a:srgbClr val="182B3A"/>
                           </a:solidFill>
@@ -44050,7 +44406,7 @@
                     <a:lstStyle/>
                     <a:p>
                       <a:r>
-                        <a:rPr sz="1100" b="0">
+                        <a:rPr sz="1050" b="0">
                           <a:solidFill>
                             <a:srgbClr val="182B3A"/>
                           </a:solidFill>
@@ -44072,7 +44428,7 @@
                     <a:lstStyle/>
                     <a:p>
                       <a:r>
-                        <a:rPr sz="1100" b="0">
+                        <a:rPr sz="1050" b="0">
                           <a:solidFill>
                             <a:srgbClr val="182B3A"/>
                           </a:solidFill>
@@ -44094,7 +44450,7 @@
                     <a:lstStyle/>
                     <a:p>
                       <a:r>
-                        <a:rPr sz="1100" b="0">
+                        <a:rPr sz="1050" b="0">
                           <a:solidFill>
                             <a:srgbClr val="182B3A"/>
                           </a:solidFill>
@@ -44116,7 +44472,7 @@
                     <a:lstStyle/>
                     <a:p>
                       <a:r>
-                        <a:rPr sz="1100" b="0">
+                        <a:rPr sz="1050" b="0">
                           <a:solidFill>
                             <a:srgbClr val="182B3A"/>
                           </a:solidFill>
@@ -44133,14 +44489,14 @@
                   </a:tcPr>
                 </a:tc>
               </a:tr>
-              <a:tr h="310896">
+              <a:tr h="282408">
                 <a:tc>
                   <a:txBody>
                     <a:bodyPr wrap="square"/>
                     <a:lstStyle/>
                     <a:p>
                       <a:r>
-                        <a:rPr sz="1100" b="0">
+                        <a:rPr sz="1050" b="0">
                           <a:solidFill>
                             <a:srgbClr val="182B3A"/>
                           </a:solidFill>
@@ -44162,7 +44518,7 @@
                     <a:lstStyle/>
                     <a:p>
                       <a:r>
-                        <a:rPr sz="1100" b="0">
+                        <a:rPr sz="1050" b="0">
                           <a:solidFill>
                             <a:srgbClr val="182B3A"/>
                           </a:solidFill>
@@ -44184,7 +44540,7 @@
                     <a:lstStyle/>
                     <a:p>
                       <a:r>
-                        <a:rPr sz="1100" b="0">
+                        <a:rPr sz="1050" b="0">
                           <a:solidFill>
                             <a:srgbClr val="182B3A"/>
                           </a:solidFill>
@@ -44206,7 +44562,7 @@
                     <a:lstStyle/>
                     <a:p>
                       <a:r>
-                        <a:rPr sz="1100" b="0">
+                        <a:rPr sz="1050" b="0">
                           <a:solidFill>
                             <a:srgbClr val="182B3A"/>
                           </a:solidFill>
@@ -44228,7 +44584,7 @@
                     <a:lstStyle/>
                     <a:p>
                       <a:r>
-                        <a:rPr sz="1100" b="0">
+                        <a:rPr sz="1050" b="0">
                           <a:solidFill>
                             <a:srgbClr val="182B3A"/>
                           </a:solidFill>
@@ -44250,7 +44606,7 @@
                     <a:lstStyle/>
                     <a:p>
                       <a:r>
-                        <a:rPr sz="1100" b="0">
+                        <a:rPr sz="1050" b="0">
                           <a:solidFill>
                             <a:srgbClr val="182B3A"/>
                           </a:solidFill>
@@ -44272,7 +44628,7 @@
                     <a:lstStyle/>
                     <a:p>
                       <a:r>
-                        <a:rPr sz="1100" b="0">
+                        <a:rPr sz="1050" b="0">
                           <a:solidFill>
                             <a:srgbClr val="182B3A"/>
                           </a:solidFill>
@@ -44294,7 +44650,7 @@
                     <a:lstStyle/>
                     <a:p>
                       <a:r>
-                        <a:rPr sz="1100" b="0">
+                        <a:rPr sz="1050" b="0">
                           <a:solidFill>
                             <a:srgbClr val="182B3A"/>
                           </a:solidFill>
@@ -44311,20 +44667,20 @@
                   </a:tcPr>
                 </a:tc>
               </a:tr>
-              <a:tr h="310896">
+              <a:tr h="282408">
                 <a:tc>
                   <a:txBody>
                     <a:bodyPr wrap="square"/>
                     <a:lstStyle/>
                     <a:p>
                       <a:r>
-                        <a:rPr sz="1100" b="0">
+                        <a:rPr sz="1050" b="0">
                           <a:solidFill>
                             <a:srgbClr val="182B3A"/>
                           </a:solidFill>
                           <a:latin typeface="Calibri"/>
                         </a:rPr>
-                        <a:t>ADMM</a:t>
+                        <a:t>Pegasos</a:t>
                       </a:r>
                     </a:p>
                   </a:txBody>
@@ -44340,7 +44696,7 @@
                     <a:lstStyle/>
                     <a:p>
                       <a:r>
-                        <a:rPr sz="1100" b="0">
+                        <a:rPr sz="1050" b="0">
                           <a:solidFill>
                             <a:srgbClr val="182B3A"/>
                           </a:solidFill>
@@ -44362,7 +44718,7 @@
                     <a:lstStyle/>
                     <a:p>
                       <a:r>
-                        <a:rPr sz="1100" b="0">
+                        <a:rPr sz="1050" b="0">
                           <a:solidFill>
                             <a:srgbClr val="182B3A"/>
                           </a:solidFill>
@@ -44384,13 +44740,13 @@
                     <a:lstStyle/>
                     <a:p>
                       <a:r>
-                        <a:rPr sz="1100" b="0">
+                        <a:rPr sz="1050" b="0">
                           <a:solidFill>
                             <a:srgbClr val="182B3A"/>
                           </a:solidFill>
                           <a:latin typeface="Calibri"/>
                         </a:rPr>
-                        <a:t>102</a:t>
+                        <a:t>n/a</a:t>
                       </a:r>
                     </a:p>
                   </a:txBody>
@@ -44406,13 +44762,13 @@
                     <a:lstStyle/>
                     <a:p>
                       <a:r>
-                        <a:rPr sz="1100" b="0">
+                        <a:rPr sz="1050" b="0">
                           <a:solidFill>
                             <a:srgbClr val="182B3A"/>
                           </a:solidFill>
                           <a:latin typeface="Calibri"/>
                         </a:rPr>
-                        <a:t>565</a:t>
+                        <a:t>706</a:t>
                       </a:r>
                     </a:p>
                   </a:txBody>
@@ -44428,13 +44784,13 @@
                     <a:lstStyle/>
                     <a:p>
                       <a:r>
-                        <a:rPr sz="1100" b="0">
+                        <a:rPr sz="1050" b="0">
                           <a:solidFill>
                             <a:srgbClr val="182B3A"/>
                           </a:solidFill>
                           <a:latin typeface="Calibri"/>
                         </a:rPr>
-                        <a:t>6214.4</a:t>
+                        <a:t>8667.0</a:t>
                       </a:r>
                     </a:p>
                   </a:txBody>
@@ -44450,7 +44806,363 @@
                     <a:lstStyle/>
                     <a:p>
                       <a:r>
-                        <a:rPr sz="1100" b="0">
+                        <a:rPr sz="1050" b="0">
+                          <a:solidFill>
+                            <a:srgbClr val="182B3A"/>
+                          </a:solidFill>
+                          <a:latin typeface="Calibri"/>
+                        </a:rPr>
+                        <a:t>0.75 ± 0.05</a:t>
+                      </a:r>
+                    </a:p>
+                  </a:txBody>
+                  <a:tcPr marL="54864" marR="36576" marT="18288" marB="18288">
+                    <a:solidFill>
+                      <a:srgbClr val="F2F4F6"/>
+                    </a:solidFill>
+                  </a:tcPr>
+                </a:tc>
+                <a:tc>
+                  <a:txBody>
+                    <a:bodyPr wrap="square"/>
+                    <a:lstStyle/>
+                    <a:p>
+                      <a:r>
+                        <a:rPr sz="1050" b="0">
+                          <a:solidFill>
+                            <a:srgbClr val="182B3A"/>
+                          </a:solidFill>
+                          <a:latin typeface="Calibri"/>
+                        </a:rPr>
+                        <a:t>0.01447</a:t>
+                      </a:r>
+                    </a:p>
+                  </a:txBody>
+                  <a:tcPr marL="54864" marR="36576" marT="18288" marB="18288">
+                    <a:solidFill>
+                      <a:srgbClr val="F2F4F6"/>
+                    </a:solidFill>
+                  </a:tcPr>
+                </a:tc>
+              </a:tr>
+              <a:tr h="282408">
+                <a:tc>
+                  <a:txBody>
+                    <a:bodyPr wrap="square"/>
+                    <a:lstStyle/>
+                    <a:p>
+                      <a:r>
+                        <a:rPr sz="1050" b="0">
+                          <a:solidFill>
+                            <a:srgbClr val="182B3A"/>
+                          </a:solidFill>
+                          <a:latin typeface="Calibri"/>
+                        </a:rPr>
+                        <a:t>ADMM</a:t>
+                      </a:r>
+                    </a:p>
+                  </a:txBody>
+                  <a:tcPr marL="54864" marR="36576" marT="18288" marB="18288">
+                    <a:solidFill>
+                      <a:srgbClr val="FFFFFF"/>
+                    </a:solidFill>
+                  </a:tcPr>
+                </a:tc>
+                <a:tc>
+                  <a:txBody>
+                    <a:bodyPr wrap="square"/>
+                    <a:lstStyle/>
+                    <a:p>
+                      <a:r>
+                        <a:rPr sz="1050" b="0">
+                          <a:solidFill>
+                            <a:srgbClr val="182B3A"/>
+                          </a:solidFill>
+                          <a:latin typeface="Calibri"/>
+                        </a:rPr>
+                        <a:t>50:1</a:t>
+                      </a:r>
+                    </a:p>
+                  </a:txBody>
+                  <a:tcPr marL="54864" marR="36576" marT="18288" marB="18288">
+                    <a:solidFill>
+                      <a:srgbClr val="FFFFFF"/>
+                    </a:solidFill>
+                  </a:tcPr>
+                </a:tc>
+                <a:tc>
+                  <a:txBody>
+                    <a:bodyPr wrap="square"/>
+                    <a:lstStyle/>
+                    <a:p>
+                      <a:r>
+                        <a:rPr sz="1050" b="0">
+                          <a:solidFill>
+                            <a:srgbClr val="182B3A"/>
+                          </a:solidFill>
+                          <a:latin typeface="Calibri"/>
+                        </a:rPr>
+                        <a:t>0/5</a:t>
+                      </a:r>
+                    </a:p>
+                  </a:txBody>
+                  <a:tcPr marL="54864" marR="36576" marT="18288" marB="18288">
+                    <a:solidFill>
+                      <a:srgbClr val="FFFFFF"/>
+                    </a:solidFill>
+                  </a:tcPr>
+                </a:tc>
+                <a:tc>
+                  <a:txBody>
+                    <a:bodyPr wrap="square"/>
+                    <a:lstStyle/>
+                    <a:p>
+                      <a:r>
+                        <a:rPr sz="1050" b="0">
+                          <a:solidFill>
+                            <a:srgbClr val="182B3A"/>
+                          </a:solidFill>
+                          <a:latin typeface="Calibri"/>
+                        </a:rPr>
+                        <a:t>102</a:t>
+                      </a:r>
+                    </a:p>
+                  </a:txBody>
+                  <a:tcPr marL="54864" marR="36576" marT="18288" marB="18288">
+                    <a:solidFill>
+                      <a:srgbClr val="FFFFFF"/>
+                    </a:solidFill>
+                  </a:tcPr>
+                </a:tc>
+                <a:tc>
+                  <a:txBody>
+                    <a:bodyPr wrap="square"/>
+                    <a:lstStyle/>
+                    <a:p>
+                      <a:r>
+                        <a:rPr sz="1050" b="0">
+                          <a:solidFill>
+                            <a:srgbClr val="182B3A"/>
+                          </a:solidFill>
+                          <a:latin typeface="Calibri"/>
+                        </a:rPr>
+                        <a:t>565</a:t>
+                      </a:r>
+                    </a:p>
+                  </a:txBody>
+                  <a:tcPr marL="54864" marR="36576" marT="18288" marB="18288">
+                    <a:solidFill>
+                      <a:srgbClr val="FFFFFF"/>
+                    </a:solidFill>
+                  </a:tcPr>
+                </a:tc>
+                <a:tc>
+                  <a:txBody>
+                    <a:bodyPr wrap="square"/>
+                    <a:lstStyle/>
+                    <a:p>
+                      <a:r>
+                        <a:rPr sz="1050" b="0">
+                          <a:solidFill>
+                            <a:srgbClr val="182B3A"/>
+                          </a:solidFill>
+                          <a:latin typeface="Calibri"/>
+                        </a:rPr>
+                        <a:t>6214.4</a:t>
+                      </a:r>
+                    </a:p>
+                  </a:txBody>
+                  <a:tcPr marL="54864" marR="36576" marT="18288" marB="18288">
+                    <a:solidFill>
+                      <a:srgbClr val="FFFFFF"/>
+                    </a:solidFill>
+                  </a:tcPr>
+                </a:tc>
+                <a:tc>
+                  <a:txBody>
+                    <a:bodyPr wrap="square"/>
+                    <a:lstStyle/>
+                    <a:p>
+                      <a:r>
+                        <a:rPr sz="1050" b="0">
+                          <a:solidFill>
+                            <a:srgbClr val="182B3A"/>
+                          </a:solidFill>
+                          <a:latin typeface="Calibri"/>
+                        </a:rPr>
+                        <a:t>0.76 ± 0.05</a:t>
+                      </a:r>
+                    </a:p>
+                  </a:txBody>
+                  <a:tcPr marL="54864" marR="36576" marT="18288" marB="18288">
+                    <a:solidFill>
+                      <a:srgbClr val="FFFFFF"/>
+                    </a:solidFill>
+                  </a:tcPr>
+                </a:tc>
+                <a:tc>
+                  <a:txBody>
+                    <a:bodyPr wrap="square"/>
+                    <a:lstStyle/>
+                    <a:p>
+                      <a:r>
+                        <a:rPr sz="1050" b="0">
+                          <a:solidFill>
+                            <a:srgbClr val="182B3A"/>
+                          </a:solidFill>
+                          <a:latin typeface="Calibri"/>
+                        </a:rPr>
+                        <a:t>0.01462</a:t>
+                      </a:r>
+                    </a:p>
+                  </a:txBody>
+                  <a:tcPr marL="54864" marR="36576" marT="18288" marB="18288">
+                    <a:solidFill>
+                      <a:srgbClr val="FFFFFF"/>
+                    </a:solidFill>
+                  </a:tcPr>
+                </a:tc>
+              </a:tr>
+              <a:tr h="282419">
+                <a:tc>
+                  <a:txBody>
+                    <a:bodyPr wrap="square"/>
+                    <a:lstStyle/>
+                    <a:p>
+                      <a:r>
+                        <a:rPr sz="1050" b="0">
+                          <a:solidFill>
+                            <a:srgbClr val="182B3A"/>
+                          </a:solidFill>
+                          <a:latin typeface="Calibri"/>
+                        </a:rPr>
+                        <a:t>PA-ADMM</a:t>
+                      </a:r>
+                    </a:p>
+                  </a:txBody>
+                  <a:tcPr marL="54864" marR="36576" marT="18288" marB="18288">
+                    <a:solidFill>
+                      <a:srgbClr val="F2F4F6"/>
+                    </a:solidFill>
+                  </a:tcPr>
+                </a:tc>
+                <a:tc>
+                  <a:txBody>
+                    <a:bodyPr wrap="square"/>
+                    <a:lstStyle/>
+                    <a:p>
+                      <a:r>
+                        <a:rPr sz="1050" b="0">
+                          <a:solidFill>
+                            <a:srgbClr val="182B3A"/>
+                          </a:solidFill>
+                          <a:latin typeface="Calibri"/>
+                        </a:rPr>
+                        <a:t>50:1</a:t>
+                      </a:r>
+                    </a:p>
+                  </a:txBody>
+                  <a:tcPr marL="54864" marR="36576" marT="18288" marB="18288">
+                    <a:solidFill>
+                      <a:srgbClr val="F2F4F6"/>
+                    </a:solidFill>
+                  </a:tcPr>
+                </a:tc>
+                <a:tc>
+                  <a:txBody>
+                    <a:bodyPr wrap="square"/>
+                    <a:lstStyle/>
+                    <a:p>
+                      <a:r>
+                        <a:rPr sz="1050" b="0">
+                          <a:solidFill>
+                            <a:srgbClr val="182B3A"/>
+                          </a:solidFill>
+                          <a:latin typeface="Calibri"/>
+                        </a:rPr>
+                        <a:t>3/5</a:t>
+                      </a:r>
+                    </a:p>
+                  </a:txBody>
+                  <a:tcPr marL="54864" marR="36576" marT="18288" marB="18288">
+                    <a:solidFill>
+                      <a:srgbClr val="F2F4F6"/>
+                    </a:solidFill>
+                  </a:tcPr>
+                </a:tc>
+                <a:tc>
+                  <a:txBody>
+                    <a:bodyPr wrap="square"/>
+                    <a:lstStyle/>
+                    <a:p>
+                      <a:r>
+                        <a:rPr sz="1050" b="0">
+                          <a:solidFill>
+                            <a:srgbClr val="182B3A"/>
+                          </a:solidFill>
+                          <a:latin typeface="Calibri"/>
+                        </a:rPr>
+                        <a:t>75</a:t>
+                      </a:r>
+                    </a:p>
+                  </a:txBody>
+                  <a:tcPr marL="54864" marR="36576" marT="18288" marB="18288">
+                    <a:solidFill>
+                      <a:srgbClr val="F2F4F6"/>
+                    </a:solidFill>
+                  </a:tcPr>
+                </a:tc>
+                <a:tc>
+                  <a:txBody>
+                    <a:bodyPr wrap="square"/>
+                    <a:lstStyle/>
+                    <a:p>
+                      <a:r>
+                        <a:rPr sz="1050" b="0">
+                          <a:solidFill>
+                            <a:srgbClr val="182B3A"/>
+                          </a:solidFill>
+                          <a:latin typeface="Calibri"/>
+                        </a:rPr>
+                        <a:t>425</a:t>
+                      </a:r>
+                    </a:p>
+                  </a:txBody>
+                  <a:tcPr marL="54864" marR="36576" marT="18288" marB="18288">
+                    <a:solidFill>
+                      <a:srgbClr val="F2F4F6"/>
+                    </a:solidFill>
+                  </a:tcPr>
+                </a:tc>
+                <a:tc>
+                  <a:txBody>
+                    <a:bodyPr wrap="square"/>
+                    <a:lstStyle/>
+                    <a:p>
+                      <a:r>
+                        <a:rPr sz="1050" b="0">
+                          <a:solidFill>
+                            <a:srgbClr val="182B3A"/>
+                          </a:solidFill>
+                          <a:latin typeface="Calibri"/>
+                        </a:rPr>
+                        <a:t>6214.2</a:t>
+                      </a:r>
+                    </a:p>
+                  </a:txBody>
+                  <a:tcPr marL="54864" marR="36576" marT="18288" marB="18288">
+                    <a:solidFill>
+                      <a:srgbClr val="F2F4F6"/>
+                    </a:solidFill>
+                  </a:tcPr>
+                </a:tc>
+                <a:tc>
+                  <a:txBody>
+                    <a:bodyPr wrap="square"/>
+                    <a:lstStyle/>
+                    <a:p>
+                      <a:r>
+                        <a:rPr sz="1050" b="0">
                           <a:solidFill>
                             <a:srgbClr val="182B3A"/>
                           </a:solidFill>
@@ -44472,185 +45184,7 @@
                     <a:lstStyle/>
                     <a:p>
                       <a:r>
-                        <a:rPr sz="1100" b="0">
-                          <a:solidFill>
-                            <a:srgbClr val="182B3A"/>
-                          </a:solidFill>
-                          <a:latin typeface="Calibri"/>
-                        </a:rPr>
-                        <a:t>0.01462</a:t>
-                      </a:r>
-                    </a:p>
-                  </a:txBody>
-                  <a:tcPr marL="54864" marR="36576" marT="18288" marB="18288">
-                    <a:solidFill>
-                      <a:srgbClr val="F2F4F6"/>
-                    </a:solidFill>
-                  </a:tcPr>
-                </a:tc>
-              </a:tr>
-              <a:tr h="310896">
-                <a:tc>
-                  <a:txBody>
-                    <a:bodyPr wrap="square"/>
-                    <a:lstStyle/>
-                    <a:p>
-                      <a:r>
-                        <a:rPr sz="1100" b="0">
-                          <a:solidFill>
-                            <a:srgbClr val="182B3A"/>
-                          </a:solidFill>
-                          <a:latin typeface="Calibri"/>
-                        </a:rPr>
-                        <a:t>PA-ADMM</a:t>
-                      </a:r>
-                    </a:p>
-                  </a:txBody>
-                  <a:tcPr marL="54864" marR="36576" marT="18288" marB="18288">
-                    <a:solidFill>
-                      <a:srgbClr val="FFFFFF"/>
-                    </a:solidFill>
-                  </a:tcPr>
-                </a:tc>
-                <a:tc>
-                  <a:txBody>
-                    <a:bodyPr wrap="square"/>
-                    <a:lstStyle/>
-                    <a:p>
-                      <a:r>
-                        <a:rPr sz="1100" b="0">
-                          <a:solidFill>
-                            <a:srgbClr val="182B3A"/>
-                          </a:solidFill>
-                          <a:latin typeface="Calibri"/>
-                        </a:rPr>
-                        <a:t>50:1</a:t>
-                      </a:r>
-                    </a:p>
-                  </a:txBody>
-                  <a:tcPr marL="54864" marR="36576" marT="18288" marB="18288">
-                    <a:solidFill>
-                      <a:srgbClr val="FFFFFF"/>
-                    </a:solidFill>
-                  </a:tcPr>
-                </a:tc>
-                <a:tc>
-                  <a:txBody>
-                    <a:bodyPr wrap="square"/>
-                    <a:lstStyle/>
-                    <a:p>
-                      <a:r>
-                        <a:rPr sz="1100" b="0">
-                          <a:solidFill>
-                            <a:srgbClr val="182B3A"/>
-                          </a:solidFill>
-                          <a:latin typeface="Calibri"/>
-                        </a:rPr>
-                        <a:t>3/5</a:t>
-                      </a:r>
-                    </a:p>
-                  </a:txBody>
-                  <a:tcPr marL="54864" marR="36576" marT="18288" marB="18288">
-                    <a:solidFill>
-                      <a:srgbClr val="FFFFFF"/>
-                    </a:solidFill>
-                  </a:tcPr>
-                </a:tc>
-                <a:tc>
-                  <a:txBody>
-                    <a:bodyPr wrap="square"/>
-                    <a:lstStyle/>
-                    <a:p>
-                      <a:r>
-                        <a:rPr sz="1100" b="0">
-                          <a:solidFill>
-                            <a:srgbClr val="182B3A"/>
-                          </a:solidFill>
-                          <a:latin typeface="Calibri"/>
-                        </a:rPr>
-                        <a:t>75</a:t>
-                      </a:r>
-                    </a:p>
-                  </a:txBody>
-                  <a:tcPr marL="54864" marR="36576" marT="18288" marB="18288">
-                    <a:solidFill>
-                      <a:srgbClr val="FFFFFF"/>
-                    </a:solidFill>
-                  </a:tcPr>
-                </a:tc>
-                <a:tc>
-                  <a:txBody>
-                    <a:bodyPr wrap="square"/>
-                    <a:lstStyle/>
-                    <a:p>
-                      <a:r>
-                        <a:rPr sz="1100" b="0">
-                          <a:solidFill>
-                            <a:srgbClr val="182B3A"/>
-                          </a:solidFill>
-                          <a:latin typeface="Calibri"/>
-                        </a:rPr>
-                        <a:t>425</a:t>
-                      </a:r>
-                    </a:p>
-                  </a:txBody>
-                  <a:tcPr marL="54864" marR="36576" marT="18288" marB="18288">
-                    <a:solidFill>
-                      <a:srgbClr val="FFFFFF"/>
-                    </a:solidFill>
-                  </a:tcPr>
-                </a:tc>
-                <a:tc>
-                  <a:txBody>
-                    <a:bodyPr wrap="square"/>
-                    <a:lstStyle/>
-                    <a:p>
-                      <a:r>
-                        <a:rPr sz="1100" b="0">
-                          <a:solidFill>
-                            <a:srgbClr val="182B3A"/>
-                          </a:solidFill>
-                          <a:latin typeface="Calibri"/>
-                        </a:rPr>
-                        <a:t>6214.2</a:t>
-                      </a:r>
-                    </a:p>
-                  </a:txBody>
-                  <a:tcPr marL="54864" marR="36576" marT="18288" marB="18288">
-                    <a:solidFill>
-                      <a:srgbClr val="FFFFFF"/>
-                    </a:solidFill>
-                  </a:tcPr>
-                </a:tc>
-                <a:tc>
-                  <a:txBody>
-                    <a:bodyPr wrap="square"/>
-                    <a:lstStyle/>
-                    <a:p>
-                      <a:r>
-                        <a:rPr sz="1100" b="0">
-                          <a:solidFill>
-                            <a:srgbClr val="182B3A"/>
-                          </a:solidFill>
-                          <a:latin typeface="Calibri"/>
-                        </a:rPr>
-                        <a:t>0.76 ± 0.05</a:t>
-                      </a:r>
-                    </a:p>
-                  </a:txBody>
-                  <a:tcPr marL="54864" marR="36576" marT="18288" marB="18288">
-                    <a:solidFill>
-                      <a:srgbClr val="FFFFFF"/>
-                    </a:solidFill>
-                  </a:tcPr>
-                </a:tc>
-                <a:tc>
-                  <a:txBody>
-                    <a:bodyPr wrap="square"/>
-                    <a:lstStyle/>
-                    <a:p>
-                      <a:r>
-                        <a:rPr sz="1100" b="0">
+                        <a:rPr sz="1050" b="0">
                           <a:solidFill>
                             <a:srgbClr val="182B3A"/>
                           </a:solidFill>
@@ -44662,7 +45196,7 @@
                   </a:txBody>
                   <a:tcPr marL="54864" marR="36576" marT="18288" marB="18288">
                     <a:solidFill>
-                      <a:srgbClr val="FFFFFF"/>
+                      <a:srgbClr val="F2F4F6"/>
                     </a:solidFill>
                   </a:tcPr>
                 </a:tc>
@@ -44679,8 +45213,8 @@
         </p:nvSpPr>
         <p:spPr>
           <a:xfrm>
-            <a:off x="530352" y="4782312"/>
-            <a:ext cx="10607040" cy="731520"/>
+            <a:off x="530352" y="5289803"/>
+            <a:ext cx="10607040" cy="274320"/>
           </a:xfrm>
           <a:prstGeom prst="rect">
             <a:avLst/>
@@ -44695,13 +45229,13 @@
           <a:p>
             <a:pPr algn="l"/>
             <a:r>
-              <a:rPr sz="1200" b="0">
+              <a:rPr sz="1050" b="0">
                 <a:solidFill>
                   <a:srgbClr val="526574"/>
                 </a:solidFill>
                 <a:latin typeface="Calibri"/>
               </a:rPr>
-              <a:t>t-to-tol = median over the 5 seeds of the first checkpoint within 0.1% of that group's best observed objective; certified = the solver's own stopping certificate; PR-AUC ± sd is the seed spread.</a:t>
+              <a:t>t-to-tol = median over 5 seeds of the first checkpoint within 0.1% of the best; certified = the solver's stopping certificate; PR-AUC is mean ± seed sd.</a:t>
             </a:r>
           </a:p>
         </p:txBody>
@@ -45033,7 +45567,7 @@
                 </a:solidFill>
                 <a:latin typeface="Calibri"/>
               </a:rPr>
-              <a:t>Full data, 20:1, PA-ADMM: PR-AUC 0.76, recall at 1% FPR 87.3%, cost 0.00651 per example. The largest between-solver PR-AUC gap is 0.004 while the typical seed-to-seed sd is 0.051, so the ranking is noise, not method quality.</a:t>
+              <a:t>Full data, 20:1, PA-ADMM: PR-AUC 0.76, recall at 1% FPR 87.3%, cost 0.00651 per example. The largest between-solver PR-AUC gap is 0.011 while the typical seed-to-seed sd is 0.051, so the ranking is noise, not method quality.</a:t>
             </a:r>
           </a:p>
           <a:p>
@@ -45204,7 +45738,7 @@
                 </a:solidFill>
                 <a:latin typeface="Calibri"/>
               </a:rPr>
-              <a:t>Claim reliability and cost-aware ranking; do not claim a speed winner yet</a:t>
+              <a:t>Certified time-to-solution separates the solvers; detection quality does not</a:t>
             </a:r>
           </a:p>
         </p:txBody>
@@ -45388,7 +45922,7 @@
                 </a:solidFill>
                 <a:latin typeface="Calibri"/>
               </a:rPr>
-              <a:t>Objective values agree across solvers</a:t>
+              <a:t>The QP solution separates the solvers</a:t>
             </a:r>
           </a:p>
         </p:txBody>
@@ -45423,7 +45957,7 @@
                 </a:solidFill>
                 <a:latin typeface="Calibri"/>
               </a:rPr>
-              <a:t>At fixed C=1 the certified solvers agree to 7.7e-05 on the same QP, and every full-data run finishes within 0.1% of its group reference.</a:t>
+              <a:t>Same fixed-C QP on full data: ADMM and PA-ADMM end within 2.5e-05 of the group best, SMO 1.6% above it because it hits its update cap, Pegasos 18%–39% above it. Only the exact solvers reach the shared tolerance.</a:t>
             </a:r>
           </a:p>
         </p:txBody>
@@ -45493,7 +46027,7 @@
                 </a:solidFill>
                 <a:latin typeface="Calibri"/>
               </a:rPr>
-              <a:t>No significant ranking difference yet</a:t>
+              <a:t>5 seeds cannot certify a winner</a:t>
             </a:r>
           </a:p>
         </p:txBody>
@@ -45528,7 +46062,7 @@
                 </a:solidFill>
                 <a:latin typeface="Calibri"/>
               </a:rPr>
-              <a:t>Paired Wilcoxon over the recorded seeds: the smallest p-value across all paired tests is 0.062 (objective, cost, PR-AUC, time-to-tolerance), so seed noise dominates method differences.</a:t>
+              <a:t>The smallest two-sided p that 5 paired seeds can produce is 0.062. The objective ordering is unanimous (p = 0.062), but PR-AUC never separates (min p = 0.12): the solver changes how fast and how certifiably you reach the QP solution, not what you detect.</a:t>
             </a:r>
           </a:p>
         </p:txBody>
@@ -45738,7 +46272,7 @@
                 </a:solidFill>
                 <a:latin typeface="Calibri"/>
               </a:rPr>
-              <a:t>105 fits are recorded so far; pending: none. The capped-subset quality bars rest on a handful of test frauds, and all timings come from one single-threaded machine.</a:t>
+              <a:t>SMO is update-capped (100k) and Pegasos is epoch-capped (5,000 epochs = 15.5M steps), so neither gap is a wall-clock failure; the capped-subset quality bars rest on three test frauds, and every timing comes from one single-threaded machine.</a:t>
             </a:r>
           </a:p>
         </p:txBody>
@@ -47494,7 +48028,7 @@
                 </a:solidFill>
                 <a:latin typeface="Calibri"/>
               </a:rPr>
-              <a:t>1.  python experiments/check_solver.py --method smo|admm|pa_admm</a:t>
+              <a:t>1.  python experiments/check_solver.py --method smo|pegasos|admm|pa_admm</a:t>
             </a:r>
           </a:p>
           <a:p>
@@ -47542,7 +48076,7 @@
                 </a:solidFill>
                 <a:latin typeface="Calibri"/>
               </a:rPr>
-              <a:t>     → 7,000-row agreement check, reference_method: cvxpy</a:t>
+              <a:t>     → 7,000-row agreement check, reference = group best (no external solver)</a:t>
             </a:r>
           </a:p>
           <a:p>
